--- a/m7/diapositivos/sessao-07-m7-f04.pptx
+++ b/m7/diapositivos/sessao-07-m7-f04.pptx
@@ -3137,7 +3137,35 @@
                 <a:ea typeface="Arial" pitchFamily="34" charset="-122"/>
                 <a:cs typeface="Arial" pitchFamily="34" charset="-120"/>
               </a:rPr>
-              <a:t>LER: A — O GUARDADOR DE REBANHOS, II (EXCERTOS) (1 DE 2)</a:t>
+              <a:t>LER: A — </a:t>
+            </a:r>
+            <a:pPr indent="0" marL="0">
+              <a:buNone/>
+            </a:pPr>
+            <a:r>
+              <a:rPr lang="en-US" sz="1100" b="1" i="1" spc="250" kern="0" dirty="0">
+                <a:solidFill>
+                  <a:srgbClr val="A9A79F"/>
+                </a:solidFill>
+                <a:latin typeface="Arial" pitchFamily="34" charset="0"/>
+                <a:ea typeface="Arial" pitchFamily="34" charset="-122"/>
+                <a:cs typeface="Arial" pitchFamily="34" charset="-120"/>
+              </a:rPr>
+              <a:t>O GUARDADOR DE REBANHOS</a:t>
+            </a:r>
+            <a:pPr indent="0" marL="0">
+              <a:buNone/>
+            </a:pPr>
+            <a:r>
+              <a:rPr lang="en-US" sz="1100" b="1" spc="250" kern="0" dirty="0">
+                <a:solidFill>
+                  <a:srgbClr val="A9A79F"/>
+                </a:solidFill>
+                <a:latin typeface="Arial" pitchFamily="34" charset="0"/>
+                <a:ea typeface="Arial" pitchFamily="34" charset="-122"/>
+                <a:cs typeface="Arial" pitchFamily="34" charset="-120"/>
+              </a:rPr>
+              <a:t>, II (EXCERTOS) (1 DE 2)</a:t>
             </a:r>
             <a:endParaRPr lang="en-US" sz="1100" dirty="0"/>
           </a:p>
@@ -3302,7 +3330,35 @@
                 <a:ea typeface="Arial" pitchFamily="34" charset="-122"/>
                 <a:cs typeface="Arial" pitchFamily="34" charset="-120"/>
               </a:rPr>
-              <a:t>Alberto Caeiro (8-3-1914), Poemas de Alberto Caeiro, Ática, 1946, Arquivo Pessoa</a:t>
+              <a:t>Alberto Caeiro (8-3-1914), </a:t>
+            </a:r>
+            <a:pPr indent="0" marL="0">
+              <a:buNone/>
+            </a:pPr>
+            <a:r>
+              <a:rPr lang="en-US" sz="1200" i="1" dirty="0">
+                <a:solidFill>
+                  <a:srgbClr val="A9A79F"/>
+                </a:solidFill>
+                <a:latin typeface="Arial" pitchFamily="34" charset="0"/>
+                <a:ea typeface="Arial" pitchFamily="34" charset="-122"/>
+                <a:cs typeface="Arial" pitchFamily="34" charset="-120"/>
+              </a:rPr>
+              <a:t>Poemas de Alberto Caeiro</a:t>
+            </a:r>
+            <a:pPr indent="0" marL="0">
+              <a:buNone/>
+            </a:pPr>
+            <a:r>
+              <a:rPr lang="en-US" sz="1200" dirty="0">
+                <a:solidFill>
+                  <a:srgbClr val="A9A79F"/>
+                </a:solidFill>
+                <a:latin typeface="Arial" pitchFamily="34" charset="0"/>
+                <a:ea typeface="Arial" pitchFamily="34" charset="-122"/>
+                <a:cs typeface="Arial" pitchFamily="34" charset="-120"/>
+              </a:rPr>
+              <a:t>, Ática, 1946, Arquivo Pessoa</a:t>
             </a:r>
             <a:endParaRPr lang="en-US" sz="1200" dirty="0"/>
           </a:p>
@@ -3537,7 +3593,35 @@
                 <a:ea typeface="Arial" pitchFamily="34" charset="-122"/>
                 <a:cs typeface="Arial" pitchFamily="34" charset="-120"/>
               </a:rPr>
-              <a:t>LER: A — O GUARDADOR DE REBANHOS, II (EXCERTOS) (2 DE 2)</a:t>
+              <a:t>LER: A — </a:t>
+            </a:r>
+            <a:pPr indent="0" marL="0">
+              <a:buNone/>
+            </a:pPr>
+            <a:r>
+              <a:rPr lang="en-US" sz="1100" b="1" i="1" spc="250" kern="0" dirty="0">
+                <a:solidFill>
+                  <a:srgbClr val="A9A79F"/>
+                </a:solidFill>
+                <a:latin typeface="Arial" pitchFamily="34" charset="0"/>
+                <a:ea typeface="Arial" pitchFamily="34" charset="-122"/>
+                <a:cs typeface="Arial" pitchFamily="34" charset="-120"/>
+              </a:rPr>
+              <a:t>O GUARDADOR DE REBANHOS</a:t>
+            </a:r>
+            <a:pPr indent="0" marL="0">
+              <a:buNone/>
+            </a:pPr>
+            <a:r>
+              <a:rPr lang="en-US" sz="1100" b="1" spc="250" kern="0" dirty="0">
+                <a:solidFill>
+                  <a:srgbClr val="A9A79F"/>
+                </a:solidFill>
+                <a:latin typeface="Arial" pitchFamily="34" charset="0"/>
+                <a:ea typeface="Arial" pitchFamily="34" charset="-122"/>
+                <a:cs typeface="Arial" pitchFamily="34" charset="-120"/>
+              </a:rPr>
+              <a:t>, II (EXCERTOS) (2 DE 2)</a:t>
             </a:r>
             <a:endParaRPr lang="en-US" sz="1100" dirty="0"/>
           </a:p>
@@ -3662,7 +3746,35 @@
                 <a:ea typeface="Arial" pitchFamily="34" charset="-122"/>
                 <a:cs typeface="Arial" pitchFamily="34" charset="-120"/>
               </a:rPr>
-              <a:t>Alberto Caeiro (8-3-1914), Poemas de Alberto Caeiro, Ática, 1946, Arquivo Pessoa</a:t>
+              <a:t>Alberto Caeiro (8-3-1914), </a:t>
+            </a:r>
+            <a:pPr indent="0" marL="0">
+              <a:buNone/>
+            </a:pPr>
+            <a:r>
+              <a:rPr lang="en-US" sz="1200" i="1" dirty="0">
+                <a:solidFill>
+                  <a:srgbClr val="A9A79F"/>
+                </a:solidFill>
+                <a:latin typeface="Arial" pitchFamily="34" charset="0"/>
+                <a:ea typeface="Arial" pitchFamily="34" charset="-122"/>
+                <a:cs typeface="Arial" pitchFamily="34" charset="-120"/>
+              </a:rPr>
+              <a:t>Poemas de Alberto Caeiro</a:t>
+            </a:r>
+            <a:pPr indent="0" marL="0">
+              <a:buNone/>
+            </a:pPr>
+            <a:r>
+              <a:rPr lang="en-US" sz="1200" dirty="0">
+                <a:solidFill>
+                  <a:srgbClr val="A9A79F"/>
+                </a:solidFill>
+                <a:latin typeface="Arial" pitchFamily="34" charset="0"/>
+                <a:ea typeface="Arial" pitchFamily="34" charset="-122"/>
+                <a:cs typeface="Arial" pitchFamily="34" charset="-120"/>
+              </a:rPr>
+              <a:t>, Ática, 1946, Arquivo Pessoa</a:t>
             </a:r>
             <a:endParaRPr lang="en-US" sz="1200" dirty="0"/>
           </a:p>
@@ -3897,7 +4009,35 @@
                 <a:ea typeface="Arial" pitchFamily="34" charset="-122"/>
                 <a:cs typeface="Arial" pitchFamily="34" charset="-120"/>
               </a:rPr>
-              <a:t>LER: B — O GUARDADOR DE REBANHOS, IX (INÍCIO)</a:t>
+              <a:t>LER: B — </a:t>
+            </a:r>
+            <a:pPr indent="0" marL="0">
+              <a:buNone/>
+            </a:pPr>
+            <a:r>
+              <a:rPr lang="en-US" sz="1100" b="1" i="1" spc="250" kern="0" dirty="0">
+                <a:solidFill>
+                  <a:srgbClr val="A9A79F"/>
+                </a:solidFill>
+                <a:latin typeface="Arial" pitchFamily="34" charset="0"/>
+                <a:ea typeface="Arial" pitchFamily="34" charset="-122"/>
+                <a:cs typeface="Arial" pitchFamily="34" charset="-120"/>
+              </a:rPr>
+              <a:t>O GUARDADOR DE REBANHOS</a:t>
+            </a:r>
+            <a:pPr indent="0" marL="0">
+              <a:buNone/>
+            </a:pPr>
+            <a:r>
+              <a:rPr lang="en-US" sz="1100" b="1" spc="250" kern="0" dirty="0">
+                <a:solidFill>
+                  <a:srgbClr val="A9A79F"/>
+                </a:solidFill>
+                <a:latin typeface="Arial" pitchFamily="34" charset="0"/>
+                <a:ea typeface="Arial" pitchFamily="34" charset="-122"/>
+                <a:cs typeface="Arial" pitchFamily="34" charset="-120"/>
+              </a:rPr>
+              <a:t>, IX (INÍCIO)</a:t>
             </a:r>
             <a:endParaRPr lang="en-US" sz="1100" dirty="0"/>
           </a:p>
@@ -4597,7 +4737,41 @@
                 <a:ea typeface="Arial" pitchFamily="34" charset="-122"/>
                 <a:cs typeface="Arial" pitchFamily="34" charset="-120"/>
               </a:rPr>
-              <a:t>Nos poemas II e IX de O Guardador de Rebanhos a poesia é feita de sensações: olhar, ouvir, sentir com o corpo, sem metafísica.</a:t>
+              <a:t>Nos poemas II e IX de </a:t>
+            </a:r>
+            <a:pPr indent="0" marL="0">
+              <a:lnSpc>
+                <a:spcPct val="105000"/>
+              </a:lnSpc>
+              <a:buNone/>
+            </a:pPr>
+            <a:r>
+              <a:rPr lang="en-US" sz="2200" i="1" dirty="0">
+                <a:solidFill>
+                  <a:srgbClr val="F2F0EA"/>
+                </a:solidFill>
+                <a:latin typeface="Arial" pitchFamily="34" charset="0"/>
+                <a:ea typeface="Arial" pitchFamily="34" charset="-122"/>
+                <a:cs typeface="Arial" pitchFamily="34" charset="-120"/>
+              </a:rPr>
+              <a:t>O Guardador de Rebanhos</a:t>
+            </a:r>
+            <a:pPr indent="0" marL="0">
+              <a:lnSpc>
+                <a:spcPct val="105000"/>
+              </a:lnSpc>
+              <a:buNone/>
+            </a:pPr>
+            <a:r>
+              <a:rPr lang="en-US" sz="2200" dirty="0">
+                <a:solidFill>
+                  <a:srgbClr val="F2F0EA"/>
+                </a:solidFill>
+                <a:latin typeface="Arial" pitchFamily="34" charset="0"/>
+                <a:ea typeface="Arial" pitchFamily="34" charset="-122"/>
+                <a:cs typeface="Arial" pitchFamily="34" charset="-120"/>
+              </a:rPr>
+              <a:t> a poesia é feita de sensações: olhar, ouvir, sentir com o corpo, sem metafísica.</a:t>
             </a:r>
             <a:endParaRPr lang="en-US" sz="2200" dirty="0"/>
           </a:p>
